--- a/set/2026-08-16 ECBC-CH.pptx
+++ b/set/2026-08-16 ECBC-CH.pptx
@@ -294,7 +294,7 @@
           <a:p>
             <a:fld id="{E759A0DE-F190-5444-87AC-4719D5F20D15}" type="datetimeFigureOut">
               <a:rPr lang="en-US" smtClean="0"/>
-              <a:t>8/15/26</a:t>
+              <a:t>8/16/26</a:t>
             </a:fld>
             <a:endParaRPr lang="en-US"/>
           </a:p>
@@ -492,7 +492,7 @@
           <a:p>
             <a:fld id="{E759A0DE-F190-5444-87AC-4719D5F20D15}" type="datetimeFigureOut">
               <a:rPr lang="en-US" smtClean="0"/>
-              <a:t>8/15/26</a:t>
+              <a:t>8/16/26</a:t>
             </a:fld>
             <a:endParaRPr lang="en-US"/>
           </a:p>
@@ -700,7 +700,7 @@
           <a:p>
             <a:fld id="{E759A0DE-F190-5444-87AC-4719D5F20D15}" type="datetimeFigureOut">
               <a:rPr lang="en-US" smtClean="0"/>
-              <a:t>8/15/26</a:t>
+              <a:t>8/16/26</a:t>
             </a:fld>
             <a:endParaRPr lang="en-US"/>
           </a:p>
@@ -898,7 +898,7 @@
           <a:p>
             <a:fld id="{E759A0DE-F190-5444-87AC-4719D5F20D15}" type="datetimeFigureOut">
               <a:rPr lang="en-US" smtClean="0"/>
-              <a:t>8/15/26</a:t>
+              <a:t>8/16/26</a:t>
             </a:fld>
             <a:endParaRPr lang="en-US"/>
           </a:p>
@@ -1173,7 +1173,7 @@
           <a:p>
             <a:fld id="{E759A0DE-F190-5444-87AC-4719D5F20D15}" type="datetimeFigureOut">
               <a:rPr lang="en-US" smtClean="0"/>
-              <a:t>8/15/26</a:t>
+              <a:t>8/16/26</a:t>
             </a:fld>
             <a:endParaRPr lang="en-US"/>
           </a:p>
@@ -1438,7 +1438,7 @@
           <a:p>
             <a:fld id="{E759A0DE-F190-5444-87AC-4719D5F20D15}" type="datetimeFigureOut">
               <a:rPr lang="en-US" smtClean="0"/>
-              <a:t>8/15/26</a:t>
+              <a:t>8/16/26</a:t>
             </a:fld>
             <a:endParaRPr lang="en-US"/>
           </a:p>
@@ -1850,7 +1850,7 @@
           <a:p>
             <a:fld id="{E759A0DE-F190-5444-87AC-4719D5F20D15}" type="datetimeFigureOut">
               <a:rPr lang="en-US" smtClean="0"/>
-              <a:t>8/15/26</a:t>
+              <a:t>8/16/26</a:t>
             </a:fld>
             <a:endParaRPr lang="en-US"/>
           </a:p>
@@ -1991,7 +1991,7 @@
           <a:p>
             <a:fld id="{E759A0DE-F190-5444-87AC-4719D5F20D15}" type="datetimeFigureOut">
               <a:rPr lang="en-US" smtClean="0"/>
-              <a:t>8/15/26</a:t>
+              <a:t>8/16/26</a:t>
             </a:fld>
             <a:endParaRPr lang="en-US"/>
           </a:p>
@@ -2104,7 +2104,7 @@
           <a:p>
             <a:fld id="{E759A0DE-F190-5444-87AC-4719D5F20D15}" type="datetimeFigureOut">
               <a:rPr lang="en-US" smtClean="0"/>
-              <a:t>8/15/26</a:t>
+              <a:t>8/16/26</a:t>
             </a:fld>
             <a:endParaRPr lang="en-US"/>
           </a:p>
@@ -2415,7 +2415,7 @@
           <a:p>
             <a:fld id="{E759A0DE-F190-5444-87AC-4719D5F20D15}" type="datetimeFigureOut">
               <a:rPr lang="en-US" smtClean="0"/>
-              <a:t>8/15/26</a:t>
+              <a:t>8/16/26</a:t>
             </a:fld>
             <a:endParaRPr lang="en-US"/>
           </a:p>
@@ -2703,7 +2703,7 @@
           <a:p>
             <a:fld id="{E759A0DE-F190-5444-87AC-4719D5F20D15}" type="datetimeFigureOut">
               <a:rPr lang="en-US" smtClean="0"/>
-              <a:t>8/15/26</a:t>
+              <a:t>8/16/26</a:t>
             </a:fld>
             <a:endParaRPr lang="en-US"/>
           </a:p>
@@ -2944,7 +2944,7 @@
           <a:p>
             <a:fld id="{E759A0DE-F190-5444-87AC-4719D5F20D15}" type="datetimeFigureOut">
               <a:rPr lang="en-US" smtClean="0"/>
-              <a:t>8/15/26</a:t>
+              <a:t>8/16/26</a:t>
             </a:fld>
             <a:endParaRPr lang="en-US"/>
           </a:p>
@@ -5291,8 +5291,8 @@
         </p:nvSpPr>
         <p:spPr>
           <a:xfrm>
-            <a:off x="11005665" y="6273225"/>
-            <a:ext cx="1007007" cy="584775"/>
+            <a:off x="9933048" y="6273225"/>
+            <a:ext cx="2258952" cy="584775"/>
           </a:xfrm>
           <a:prstGeom prst="rect">
             <a:avLst/>
@@ -5337,8 +5337,39 @@
                 <a:ea typeface="+mn-ea"/>
                 <a:cs typeface="+mn-cs"/>
               </a:rPr>
-              <a:t>END</a:t>
-            </a:r>
+              <a:t>X2 </a:t>
+            </a:r>
+            <a:r>
+              <a:rPr kumimoji="0" lang="en-US" sz="3200" b="1" i="0" u="none" strike="noStrike" kern="1200" cap="none" spc="0" normalizeH="0" baseline="0" noProof="0" dirty="0" err="1">
+                <a:ln>
+                  <a:noFill/>
+                </a:ln>
+                <a:solidFill>
+                  <a:prstClr val="white"/>
+                </a:solidFill>
+                <a:effectLst/>
+                <a:uLnTx/>
+                <a:uFillTx/>
+                <a:latin typeface="Aptos" panose="02110004020202020204"/>
+                <a:ea typeface="+mn-ea"/>
+                <a:cs typeface="+mn-cs"/>
+              </a:rPr>
+              <a:t>andEND</a:t>
+            </a:r>
+            <a:endParaRPr kumimoji="0" lang="en-US" sz="3200" b="1" i="0" u="none" strike="noStrike" kern="1200" cap="none" spc="0" normalizeH="0" baseline="0" noProof="0" dirty="0">
+              <a:ln>
+                <a:noFill/>
+              </a:ln>
+              <a:solidFill>
+                <a:prstClr val="white"/>
+              </a:solidFill>
+              <a:effectLst/>
+              <a:uLnTx/>
+              <a:uFillTx/>
+              <a:latin typeface="Aptos" panose="02110004020202020204"/>
+              <a:ea typeface="+mn-ea"/>
+              <a:cs typeface="+mn-cs"/>
+            </a:endParaRPr>
           </a:p>
         </p:txBody>
       </p:sp>
